--- a/output/week8/Week8_Presentation_BICT3202_OOAD.pptx
+++ b/output/week8/Week8_Presentation_BICT3202_OOAD.pptx
@@ -6875,7 +6875,7 @@
                 </a:solidFill>
                 <a:latin typeface="Open Sans"/>
               </a:rPr>
-              <a:t>After payment: [successful] → Create Order · [failed] → Show Error.</a:t>
+              <a:t>After payment: [successful] -&gt; Create Order · [failed] -&gt; Show Error.</a:t>
             </a:r>
           </a:p>
         </p:txBody>
@@ -7532,7 +7532,7 @@
                 </a:solidFill>
                 <a:latin typeface="Open Sans"/>
               </a:rPr>
-              <a:t>Requirement → design, with traceability</a:t>
+              <a:t>Requirement -&gt; design, with traceability</a:t>
             </a:r>
           </a:p>
         </p:txBody>
@@ -7717,7 +7717,7 @@
                 </a:solidFill>
                 <a:latin typeface="Open Sans"/>
               </a:rPr>
-              <a:t>Use case → activity → sequence → communication → analysis model → design.</a:t>
+              <a:t>Use case -&gt; activity -&gt; sequence -&gt; communication -&gt; analysis model -&gt; design.</a:t>
             </a:r>
           </a:p>
         </p:txBody>
@@ -8807,7 +8807,7 @@
                 </a:solidFill>
                 <a:latin typeface="Open Sans"/>
               </a:rPr>
-              <a:t>log in → open course → select assignment → upload → validate → submit → confirm.</a:t>
+              <a:t>log in -&gt; open course -&gt; select assignment -&gt; upload -&gt; validate -&gt; submit -&gt; confirm.</a:t>
             </a:r>
           </a:p>
           <a:p>
@@ -8844,7 +8844,7 @@
                 </a:solidFill>
                 <a:latin typeface="Open Sans"/>
               </a:rPr>
-              <a:t>Login → Open Course → Upload File → (valid? Submit : Show Error) → Confirm.</a:t>
+              <a:t>Login -&gt; Open Course -&gt; Upload File -&gt; (valid? Submit : Show Error) -&gt; Confirm.</a:t>
             </a:r>
           </a:p>
           <a:p>
@@ -8881,7 +8881,7 @@
                 </a:solidFill>
                 <a:latin typeface="Open Sans"/>
               </a:rPr>
-              <a:t>Student → Web UI → Assignment Controller → Database.</a:t>
+              <a:t>Student -&gt; Web UI -&gt; Assignment Controller -&gt; Database.</a:t>
             </a:r>
           </a:p>
           <a:p>
@@ -9449,7 +9449,7 @@
                 </a:solidFill>
                 <a:latin typeface="Open Sans"/>
               </a:rPr>
-              <a:t>REQ-05 → UC-05 → activity model → sequence model → design → test cases.</a:t>
+              <a:t>REQ-05 -&gt; UC-05 -&gt; activity model -&gt; sequence model -&gt; design -&gt; test cases.</a:t>
             </a:r>
           </a:p>
         </p:txBody>
@@ -10622,7 +10622,7 @@
                 </a:solidFill>
                 <a:latin typeface="Open Sans"/>
               </a:rPr>
-              <a:t>— 8+ messages: Student → UI → Controller → Database.</a:t>
+              <a:t>— 8+ messages: Student -&gt; UI -&gt; Controller -&gt; Database.</a:t>
             </a:r>
           </a:p>
           <a:p>
